--- a/Docs/송파구 행정동별 복지 개선방안.pptx
+++ b/Docs/송파구 행정동별 복지 개선방안.pptx
@@ -5715,14 +5715,14 @@
           <a:lstStyle/>
           <a:p>
             <a:r>
-              <a:rPr lang="ko-KR" altLang="en-US" sz="2400" b="1">
+              <a:rPr lang="ko-KR" altLang="en-US" sz="2400" b="1" dirty="0">
                 <a:solidFill>
                   <a:srgbClr val="172A46"/>
                 </a:solidFill>
                 <a:latin typeface="맑은 고딕"/>
                 <a:ea typeface="맑은 고딕"/>
               </a:rPr>
-              <a:t>기존 시설 공급량을 결합해 투자 우선순위를 확정해야 한다</a:t>
+              <a:t>기존 시설 공급량을 결합해 투자 우선순위를 확정</a:t>
             </a:r>
             <a:endParaRPr lang="ko-KR" sz="2400" b="1" dirty="0">
               <a:solidFill>
@@ -5768,41 +5768,40 @@
           </a:bodyPr>
           <a:lstStyle/>
           <a:p>
-            <a:r>
-              <a:rPr lang="ko-KR" altLang="en-US" sz="1500" b="1">
-                <a:solidFill>
-                  <a:srgbClr val="26364D"/>
-                </a:solidFill>
-                <a:latin typeface="맑은 고딕"/>
-                <a:ea typeface="맑은 고딕"/>
-              </a:rPr>
-              <a:t>행정동별 기존 복지시설 수와 면적당 공급 수준을 파악한다
-생활권 접근성과 이용 가능 인구를 반영해 공급 공백을 분석한다
-수요점수와 공급 공백을 결합해 신설</a:t>
-            </a:r>
-            <a:r>
-              <a:rPr lang="en-US" altLang="ko-KR" sz="1500" b="1">
-                <a:solidFill>
-                  <a:srgbClr val="26364D"/>
-                </a:solidFill>
-                <a:latin typeface="맑은 고딕"/>
-                <a:ea typeface="맑은 고딕"/>
-              </a:rPr>
-              <a:t>·</a:t>
-            </a:r>
-            <a:r>
-              <a:rPr lang="ko-KR" altLang="en-US" sz="1500" b="1">
-                <a:solidFill>
-                  <a:srgbClr val="26364D"/>
-                </a:solidFill>
-                <a:latin typeface="맑은 고딕"/>
-                <a:ea typeface="맑은 고딕"/>
-              </a:rPr>
-              <a:t>확충 우선순위를 도출한다
-단기 보완</a:t>
-            </a:r>
-            <a:r>
-              <a:rPr lang="en-US" altLang="ko-KR" sz="1500" b="1">
+            <a:pPr marL="0" indent="0">
+              <a:buNone/>
+            </a:pPr>
+            <a:r>
+              <a:rPr lang="ko-KR" altLang="en-US" sz="1500" b="1" dirty="0">
+                <a:solidFill>
+                  <a:srgbClr val="26364D"/>
+                </a:solidFill>
+                <a:latin typeface="맑은 고딕"/>
+                <a:ea typeface="맑은 고딕"/>
+              </a:rPr>
+              <a:t>현재까지</a:t>
+            </a:r>
+            <a:endParaRPr lang="en-US" altLang="ko-KR" sz="1500" b="1" dirty="0">
+              <a:solidFill>
+                <a:srgbClr val="26364D"/>
+              </a:solidFill>
+              <a:latin typeface="맑은 고딕"/>
+              <a:ea typeface="맑은 고딕"/>
+            </a:endParaRPr>
+          </a:p>
+          <a:p>
+            <a:r>
+              <a:rPr lang="ko-KR" altLang="en-US" sz="1500" b="1" dirty="0">
+                <a:solidFill>
+                  <a:srgbClr val="26364D"/>
+                </a:solidFill>
+                <a:latin typeface="맑은 고딕"/>
+                <a:ea typeface="맑은 고딕"/>
+              </a:rPr>
+              <a:t>행정동별 인구</a:t>
+            </a:r>
+            <a:r>
+              <a:rPr lang="en-US" altLang="ko-KR" sz="1500" b="1" dirty="0">
                 <a:solidFill>
                   <a:srgbClr val="26364D"/>
                 </a:solidFill>
@@ -5812,17 +5811,17 @@
               <a:t>, </a:t>
             </a:r>
             <a:r>
-              <a:rPr lang="ko-KR" altLang="en-US" sz="1500" b="1">
-                <a:solidFill>
-                  <a:srgbClr val="26364D"/>
-                </a:solidFill>
-                <a:latin typeface="맑은 고딕"/>
-                <a:ea typeface="맑은 고딕"/>
-              </a:rPr>
-              <a:t>중기 확충</a:t>
-            </a:r>
-            <a:r>
-              <a:rPr lang="en-US" altLang="ko-KR" sz="1500" b="1">
+              <a:rPr lang="ko-KR" altLang="en-US" sz="1500" b="1" dirty="0">
+                <a:solidFill>
+                  <a:srgbClr val="26364D"/>
+                </a:solidFill>
+                <a:latin typeface="맑은 고딕"/>
+                <a:ea typeface="맑은 고딕"/>
+              </a:rPr>
+              <a:t>연령</a:t>
+            </a:r>
+            <a:r>
+              <a:rPr lang="en-US" altLang="ko-KR" sz="1500" b="1" dirty="0">
                 <a:solidFill>
                   <a:srgbClr val="26364D"/>
                 </a:solidFill>
@@ -5832,14 +5831,280 @@
               <a:t>, </a:t>
             </a:r>
             <a:r>
-              <a:rPr lang="ko-KR" altLang="en-US" sz="1500" b="1">
-                <a:solidFill>
-                  <a:srgbClr val="26364D"/>
-                </a:solidFill>
-                <a:latin typeface="맑은 고딕"/>
-                <a:ea typeface="맑은 고딕"/>
-              </a:rPr>
-              <a:t>장기 거점화의 단계별 실행계획을 수립한다</a:t>
+              <a:rPr lang="ko-KR" altLang="en-US" sz="1500" b="1" dirty="0">
+                <a:solidFill>
+                  <a:srgbClr val="26364D"/>
+                </a:solidFill>
+                <a:latin typeface="맑은 고딕"/>
+                <a:ea typeface="맑은 고딕"/>
+              </a:rPr>
+              <a:t>가구</a:t>
+            </a:r>
+            <a:r>
+              <a:rPr lang="en-US" altLang="ko-KR" sz="1500" b="1" dirty="0">
+                <a:solidFill>
+                  <a:srgbClr val="26364D"/>
+                </a:solidFill>
+                <a:latin typeface="맑은 고딕"/>
+                <a:ea typeface="맑은 고딕"/>
+              </a:rPr>
+              <a:t> </a:t>
+            </a:r>
+            <a:r>
+              <a:rPr lang="ko-KR" altLang="en-US" sz="1500" b="1" dirty="0">
+                <a:solidFill>
+                  <a:srgbClr val="26364D"/>
+                </a:solidFill>
+                <a:latin typeface="맑은 고딕"/>
+                <a:ea typeface="맑은 고딕"/>
+              </a:rPr>
+              <a:t>구조를 기반으로 잠재 복지수요 점수를 산출</a:t>
+            </a:r>
+            <a:endParaRPr lang="en-US" altLang="ko-KR" sz="1500" b="1" dirty="0">
+              <a:solidFill>
+                <a:srgbClr val="26364D"/>
+              </a:solidFill>
+              <a:latin typeface="맑은 고딕"/>
+              <a:ea typeface="맑은 고딕"/>
+            </a:endParaRPr>
+          </a:p>
+          <a:p>
+            <a:r>
+              <a:rPr lang="ko-KR" altLang="en-US" sz="1500" b="1" dirty="0" err="1">
+                <a:solidFill>
+                  <a:srgbClr val="26364D"/>
+                </a:solidFill>
+                <a:latin typeface="맑은 고딕"/>
+                <a:ea typeface="맑은 고딕"/>
+              </a:rPr>
+              <a:t>청년소가구</a:t>
+            </a:r>
+            <a:r>
+              <a:rPr lang="ko-KR" altLang="en-US" sz="1500" b="1" dirty="0">
+                <a:solidFill>
+                  <a:srgbClr val="26364D"/>
+                </a:solidFill>
+                <a:latin typeface="맑은 고딕"/>
+                <a:ea typeface="맑은 고딕"/>
+              </a:rPr>
+              <a:t> </a:t>
+            </a:r>
+            <a:r>
+              <a:rPr lang="en-US" altLang="ko-KR" sz="1500" b="1" dirty="0">
+                <a:solidFill>
+                  <a:srgbClr val="26364D"/>
+                </a:solidFill>
+                <a:latin typeface="맑은 고딕"/>
+                <a:ea typeface="맑은 고딕"/>
+              </a:rPr>
+              <a:t>/ </a:t>
+            </a:r>
+            <a:r>
+              <a:rPr lang="ko-KR" altLang="en-US" sz="1500" b="1" dirty="0" err="1">
+                <a:solidFill>
+                  <a:srgbClr val="26364D"/>
+                </a:solidFill>
+                <a:latin typeface="맑은 고딕"/>
+                <a:ea typeface="맑은 고딕"/>
+              </a:rPr>
+              <a:t>학령기</a:t>
+            </a:r>
+            <a:r>
+              <a:rPr lang="ko-KR" altLang="en-US" sz="1500" b="1" dirty="0">
+                <a:solidFill>
+                  <a:srgbClr val="26364D"/>
+                </a:solidFill>
+                <a:latin typeface="맑은 고딕"/>
+                <a:ea typeface="맑은 고딕"/>
+              </a:rPr>
+              <a:t> 가족</a:t>
+            </a:r>
+            <a:r>
+              <a:rPr lang="en-US" altLang="ko-KR" sz="1500" b="1" dirty="0">
+                <a:solidFill>
+                  <a:srgbClr val="26364D"/>
+                </a:solidFill>
+                <a:latin typeface="맑은 고딕"/>
+                <a:ea typeface="맑은 고딕"/>
+              </a:rPr>
+              <a:t> / </a:t>
+            </a:r>
+            <a:r>
+              <a:rPr lang="ko-KR" altLang="en-US" sz="1500" b="1" dirty="0">
+                <a:solidFill>
+                  <a:srgbClr val="26364D"/>
+                </a:solidFill>
+                <a:latin typeface="맑은 고딕"/>
+                <a:ea typeface="맑은 고딕"/>
+              </a:rPr>
+              <a:t>고령층 유형별 우선지역을 도출</a:t>
+            </a:r>
+            <a:endParaRPr lang="en-US" altLang="ko-KR" sz="1500" b="1" dirty="0">
+              <a:solidFill>
+                <a:srgbClr val="26364D"/>
+              </a:solidFill>
+              <a:latin typeface="맑은 고딕"/>
+              <a:ea typeface="맑은 고딕"/>
+            </a:endParaRPr>
+          </a:p>
+          <a:p>
+            <a:endParaRPr lang="en-US" altLang="ko-KR" sz="1500" b="1" dirty="0">
+              <a:solidFill>
+                <a:srgbClr val="26364D"/>
+              </a:solidFill>
+              <a:latin typeface="맑은 고딕"/>
+              <a:ea typeface="맑은 고딕"/>
+            </a:endParaRPr>
+          </a:p>
+          <a:p>
+            <a:pPr marL="0" indent="0">
+              <a:buNone/>
+            </a:pPr>
+            <a:r>
+              <a:rPr lang="ko-KR" altLang="en-US" sz="1500" b="1" dirty="0">
+                <a:solidFill>
+                  <a:srgbClr val="26364D"/>
+                </a:solidFill>
+                <a:latin typeface="맑은 고딕"/>
+                <a:ea typeface="맑은 고딕"/>
+              </a:rPr>
+              <a:t>향후 추가 분석</a:t>
+            </a:r>
+            <a:endParaRPr lang="en-US" altLang="ko-KR" sz="1500" b="1" dirty="0">
+              <a:solidFill>
+                <a:srgbClr val="26364D"/>
+              </a:solidFill>
+              <a:latin typeface="맑은 고딕"/>
+              <a:ea typeface="맑은 고딕"/>
+            </a:endParaRPr>
+          </a:p>
+          <a:p>
+            <a:r>
+              <a:rPr lang="ko-KR" altLang="en-US" sz="1500" b="1" dirty="0">
+                <a:solidFill>
+                  <a:srgbClr val="26364D"/>
+                </a:solidFill>
+                <a:latin typeface="맑은 고딕"/>
+                <a:ea typeface="맑은 고딕"/>
+              </a:rPr>
+              <a:t>행정동별 복지시설 수와 시설 유형 데이터를 추가 수집</a:t>
+            </a:r>
+            <a:endParaRPr lang="en-US" altLang="ko-KR" sz="1500" b="1" dirty="0">
+              <a:solidFill>
+                <a:srgbClr val="26364D"/>
+              </a:solidFill>
+              <a:latin typeface="맑은 고딕"/>
+              <a:ea typeface="맑은 고딕"/>
+            </a:endParaRPr>
+          </a:p>
+          <a:p>
+            <a:r>
+              <a:rPr lang="ko-KR" altLang="en-US" sz="1500" b="1" dirty="0">
+                <a:solidFill>
+                  <a:srgbClr val="26364D"/>
+                </a:solidFill>
+                <a:latin typeface="맑은 고딕"/>
+                <a:ea typeface="맑은 고딕"/>
+              </a:rPr>
+              <a:t>면적당 시설 수</a:t>
+            </a:r>
+            <a:r>
+              <a:rPr lang="en-US" altLang="ko-KR" sz="1500" b="1" dirty="0">
+                <a:solidFill>
+                  <a:srgbClr val="26364D"/>
+                </a:solidFill>
+                <a:latin typeface="맑은 고딕"/>
+                <a:ea typeface="맑은 고딕"/>
+              </a:rPr>
+              <a:t>, </a:t>
+            </a:r>
+            <a:r>
+              <a:rPr lang="ko-KR" altLang="en-US" sz="1500" b="1" dirty="0">
+                <a:solidFill>
+                  <a:srgbClr val="26364D"/>
+                </a:solidFill>
+                <a:latin typeface="맑은 고딕"/>
+                <a:ea typeface="맑은 고딕"/>
+              </a:rPr>
+              <a:t>대상인구당 시설 수를 통해 현재 복지 인프라 수준을 정량화</a:t>
+            </a:r>
+            <a:endParaRPr lang="en-US" altLang="ko-KR" sz="1500" b="1" dirty="0">
+              <a:solidFill>
+                <a:srgbClr val="26364D"/>
+              </a:solidFill>
+              <a:latin typeface="맑은 고딕"/>
+              <a:ea typeface="맑은 고딕"/>
+            </a:endParaRPr>
+          </a:p>
+          <a:p>
+            <a:r>
+              <a:rPr lang="ko-KR" altLang="en-US" sz="1500" b="1" dirty="0">
+                <a:solidFill>
+                  <a:srgbClr val="26364D"/>
+                </a:solidFill>
+                <a:latin typeface="맑은 고딕"/>
+                <a:ea typeface="맑은 고딕"/>
+              </a:rPr>
+              <a:t>잠재 수요 점수와 시설 공급 수준을 비교해 수요</a:t>
+            </a:r>
+            <a:r>
+              <a:rPr lang="en-US" altLang="ko-KR" sz="1500" b="1" dirty="0">
+                <a:solidFill>
+                  <a:srgbClr val="26364D"/>
+                </a:solidFill>
+                <a:latin typeface="맑은 고딕"/>
+                <a:ea typeface="맑은 고딕"/>
+              </a:rPr>
+              <a:t>-</a:t>
+            </a:r>
+            <a:r>
+              <a:rPr lang="ko-KR" altLang="en-US" sz="1500" b="1" dirty="0">
+                <a:solidFill>
+                  <a:srgbClr val="26364D"/>
+                </a:solidFill>
+                <a:latin typeface="맑은 고딕"/>
+                <a:ea typeface="맑은 고딕"/>
+              </a:rPr>
+              <a:t>공급 </a:t>
+            </a:r>
+            <a:r>
+              <a:rPr lang="en-US" altLang="ko-KR" sz="1500" b="1" dirty="0">
+                <a:solidFill>
+                  <a:srgbClr val="26364D"/>
+                </a:solidFill>
+                <a:latin typeface="맑은 고딕"/>
+                <a:ea typeface="맑은 고딕"/>
+              </a:rPr>
+              <a:t>Gap </a:t>
+            </a:r>
+            <a:r>
+              <a:rPr lang="ko-KR" altLang="en-US" sz="1500" b="1" dirty="0">
+                <a:solidFill>
+                  <a:srgbClr val="26364D"/>
+                </a:solidFill>
+                <a:latin typeface="맑은 고딕"/>
+                <a:ea typeface="맑은 고딕"/>
+              </a:rPr>
+              <a:t>산출</a:t>
+            </a:r>
+            <a:endParaRPr lang="en-US" altLang="ko-KR" sz="1500" b="1" dirty="0">
+              <a:solidFill>
+                <a:srgbClr val="26364D"/>
+              </a:solidFill>
+              <a:latin typeface="맑은 고딕"/>
+              <a:ea typeface="맑은 고딕"/>
+            </a:endParaRPr>
+          </a:p>
+          <a:p>
+            <a:r>
+              <a:rPr lang="ko-KR" altLang="en-US" sz="1500" b="1" dirty="0">
+                <a:solidFill>
+                  <a:srgbClr val="26364D"/>
+                </a:solidFill>
+                <a:latin typeface="맑은 고딕"/>
+                <a:ea typeface="맑은 고딕"/>
+              </a:rPr>
+              <a:t>산출된 결과를 바탕으로 시설 투자 우선순위를 제안</a:t>
             </a:r>
             <a:endParaRPr lang="ko-KR" sz="1500" b="1" dirty="0">
               <a:solidFill>
@@ -6480,14 +6745,14 @@
           <a:lstStyle/>
           <a:p>
             <a:r>
-              <a:rPr lang="ko-KR" altLang="en-US" sz="2400" b="1">
+              <a:rPr lang="ko-KR" altLang="en-US" sz="2400" b="1" dirty="0">
                 <a:solidFill>
                   <a:srgbClr val="172A46"/>
                 </a:solidFill>
                 <a:latin typeface="맑은 고딕"/>
                 <a:ea typeface="맑은 고딕"/>
               </a:rPr>
-              <a:t>동별 인구구조 차이를 반영한 맞춤형 복지계획이 필요하다</a:t>
+              <a:t>동별 인구구조 차이를 반영한 맞춤형 복지계획 필요</a:t>
             </a:r>
             <a:endParaRPr lang="ko-KR" sz="2400" b="1" dirty="0">
               <a:solidFill>
@@ -7260,14 +7525,14 @@
           <a:lstStyle/>
           <a:p>
             <a:r>
-              <a:rPr lang="ko-KR" altLang="en-US" sz="2400" b="1">
+              <a:rPr lang="ko-KR" altLang="en-US" sz="2400" b="1" dirty="0">
                 <a:solidFill>
                   <a:srgbClr val="172A46"/>
                 </a:solidFill>
                 <a:latin typeface="맑은 고딕"/>
                 <a:ea typeface="맑은 고딕"/>
               </a:rPr>
-              <a:t>송파구 인구는 전반적으로 감소하지만 일부 동은 크게 증가했다</a:t>
+              <a:t>송파구 인구는 전반적으로 감소하지만 일부 동은 크게 증가</a:t>
             </a:r>
             <a:endParaRPr lang="ko-KR" sz="2400" b="1" dirty="0">
               <a:solidFill>
@@ -8080,14 +8345,14 @@
           <a:lstStyle/>
           <a:p>
             <a:r>
-              <a:rPr lang="ko-KR" altLang="en-US" sz="2400" b="1">
+              <a:rPr lang="ko-KR" altLang="en-US" sz="2400" b="1" dirty="0">
                 <a:solidFill>
                   <a:srgbClr val="172A46"/>
                 </a:solidFill>
                 <a:latin typeface="맑은 고딕"/>
                 <a:ea typeface="맑은 고딕"/>
               </a:rPr>
-              <a:t>일시적 개발 효과와 장기 인구 이동을 구분해야 한다</a:t>
+              <a:t>일시적 개발 효과와 장기 인구 이동의 구분</a:t>
             </a:r>
             <a:endParaRPr lang="ko-KR" sz="2400" b="1" dirty="0">
               <a:solidFill>
@@ -9121,14 +9386,14 @@
           <a:lstStyle/>
           <a:p>
             <a:r>
-              <a:rPr lang="ko-KR" altLang="en-US" sz="2400" b="1">
+              <a:rPr lang="ko-KR" altLang="en-US" sz="2400" b="1" dirty="0">
                 <a:solidFill>
                   <a:srgbClr val="172A46"/>
                 </a:solidFill>
                 <a:latin typeface="맑은 고딕"/>
                 <a:ea typeface="맑은 고딕"/>
               </a:rPr>
-              <a:t>세대당 인구는 동별 가구 특성과 복지수요를 보여준다</a:t>
+              <a:t>행정동별 가구 특성과 복지수요</a:t>
             </a:r>
             <a:endParaRPr lang="ko-KR" sz="2400" b="1" dirty="0">
               <a:solidFill>
@@ -11099,22 +11364,15 @@
           <a:lstStyle/>
           <a:p>
             <a:r>
-              <a:rPr lang="ko-KR" altLang="en-US" sz="2400" b="1">
+              <a:rPr lang="ko-KR" altLang="en-US" sz="2400" b="1" dirty="0">
                 <a:solidFill>
                   <a:srgbClr val="172A46"/>
                 </a:solidFill>
                 <a:latin typeface="맑은 고딕"/>
                 <a:ea typeface="맑은 고딕"/>
               </a:rPr>
-              <a:t>가구 규모는 연령대별 생활 형태를 뚜렷하게 구분한다</a:t>
-            </a:r>
-            <a:endParaRPr lang="ko-KR" altLang="en-US" sz="2400" b="1" dirty="0">
-              <a:solidFill>
-                <a:srgbClr val="172A46"/>
-              </a:solidFill>
-              <a:latin typeface="맑은 고딕"/>
-              <a:ea typeface="맑은 고딕"/>
-            </a:endParaRPr>
+              <a:t>가구 규모와 연령대의 상관관계</a:t>
+            </a:r>
           </a:p>
         </p:txBody>
       </p:sp>
@@ -12121,7 +12379,65 @@
                 <a:latin typeface="맑은 고딕"/>
                 <a:ea typeface="맑은 고딕"/>
               </a:rPr>
-              <a:t>낮은 세대당 인구
+              <a:t>낮은 세대당 인구</a:t>
+            </a:r>
+            <a:endParaRPr lang="en-US" altLang="ko-KR" sz="1400" dirty="0">
+              <a:solidFill>
+                <a:srgbClr val="26364D"/>
+              </a:solidFill>
+              <a:latin typeface="맑은 고딕"/>
+              <a:ea typeface="맑은 고딕"/>
+            </a:endParaRPr>
+          </a:p>
+          <a:p>
+            <a:r>
+              <a:rPr lang="ko-KR" altLang="en-US" sz="1400" dirty="0">
+                <a:solidFill>
+                  <a:srgbClr val="26364D"/>
+                </a:solidFill>
+                <a:latin typeface="맑은 고딕"/>
+                <a:ea typeface="맑은 고딕"/>
+              </a:rPr>
+              <a:t>취업상담 및 커뮤니티 시설</a:t>
+            </a:r>
+            <a:r>
+              <a:rPr lang="en-US" altLang="ko-KR" sz="1400" dirty="0">
+                <a:solidFill>
+                  <a:srgbClr val="26364D"/>
+                </a:solidFill>
+                <a:latin typeface="맑은 고딕"/>
+                <a:ea typeface="맑은 고딕"/>
+              </a:rPr>
+              <a:t>, </a:t>
+            </a:r>
+            <a:r>
+              <a:rPr lang="ko-KR" altLang="en-US" sz="1400" dirty="0">
+                <a:solidFill>
+                  <a:srgbClr val="26364D"/>
+                </a:solidFill>
+                <a:latin typeface="맑은 고딕"/>
+                <a:ea typeface="맑은 고딕"/>
+              </a:rPr>
+              <a:t>공유오피스 등</a:t>
+            </a:r>
+            <a:endParaRPr lang="en-US" altLang="ko-KR" sz="1400" dirty="0">
+              <a:solidFill>
+                <a:srgbClr val="26364D"/>
+              </a:solidFill>
+              <a:latin typeface="맑은 고딕"/>
+              <a:ea typeface="맑은 고딕"/>
+            </a:endParaRPr>
+          </a:p>
+          <a:p>
+            <a:r>
+              <a:rPr lang="ko-KR" altLang="en-US" sz="1400" dirty="0">
+                <a:solidFill>
+                  <a:srgbClr val="26364D"/>
+                </a:solidFill>
+                <a:latin typeface="맑은 고딕"/>
+                <a:ea typeface="맑은 고딕"/>
+              </a:rPr>
+              <a:t>
 </a:t>
             </a:r>
             <a:r>
@@ -12224,6 +12540,76 @@
                 <a:ea typeface="맑은 고딕"/>
               </a:rPr>
               <a:t>높은 세대당 인구
+</a:t>
+            </a:r>
+            <a:r>
+              <a:rPr lang="ko-KR" altLang="en-US" sz="1400" dirty="0" err="1">
+                <a:solidFill>
+                  <a:srgbClr val="26364D"/>
+                </a:solidFill>
+                <a:latin typeface="맑은 고딕"/>
+                <a:ea typeface="맑은 고딕"/>
+              </a:rPr>
+              <a:t>방과후</a:t>
+            </a:r>
+            <a:r>
+              <a:rPr lang="ko-KR" altLang="en-US" sz="1400" dirty="0">
+                <a:solidFill>
+                  <a:srgbClr val="26364D"/>
+                </a:solidFill>
+                <a:latin typeface="맑은 고딕"/>
+                <a:ea typeface="맑은 고딕"/>
+              </a:rPr>
+              <a:t> </a:t>
+            </a:r>
+            <a:r>
+              <a:rPr lang="ko-KR" altLang="en-US" sz="1400" dirty="0" err="1">
+                <a:solidFill>
+                  <a:srgbClr val="26364D"/>
+                </a:solidFill>
+                <a:latin typeface="맑은 고딕"/>
+                <a:ea typeface="맑은 고딕"/>
+              </a:rPr>
+              <a:t>돌봄센터</a:t>
+            </a:r>
+            <a:r>
+              <a:rPr lang="en-US" altLang="ko-KR" sz="1400" dirty="0">
+                <a:solidFill>
+                  <a:srgbClr val="26364D"/>
+                </a:solidFill>
+                <a:latin typeface="맑은 고딕"/>
+                <a:ea typeface="맑은 고딕"/>
+              </a:rPr>
+              <a:t>, </a:t>
+            </a:r>
+            <a:r>
+              <a:rPr lang="ko-KR" altLang="en-US" sz="1400" dirty="0">
+                <a:solidFill>
+                  <a:srgbClr val="26364D"/>
+                </a:solidFill>
+                <a:latin typeface="맑은 고딕"/>
+                <a:ea typeface="맑은 고딕"/>
+              </a:rPr>
+              <a:t>청소년 학습 지원센터 등</a:t>
+            </a:r>
+            <a:endParaRPr lang="en-US" altLang="ko-KR" sz="1400" dirty="0">
+              <a:solidFill>
+                <a:srgbClr val="26364D"/>
+              </a:solidFill>
+              <a:latin typeface="맑은 고딕"/>
+              <a:ea typeface="맑은 고딕"/>
+            </a:endParaRPr>
+          </a:p>
+          <a:p>
+            <a:r>
+              <a:rPr lang="ko-KR" altLang="en-US" sz="1400" dirty="0">
+                <a:solidFill>
+                  <a:srgbClr val="26364D"/>
+                </a:solidFill>
+                <a:latin typeface="맑은 고딕"/>
+                <a:ea typeface="맑은 고딕"/>
+              </a:rPr>
+              <a:t>
 고령층
 </a:t>
             </a:r>
@@ -12266,6 +12652,46 @@
                 <a:ea typeface="맑은 고딕"/>
               </a:rPr>
               <a:t>실제 인구 규모
+노인복지관</a:t>
+            </a:r>
+            <a:r>
+              <a:rPr lang="en-US" altLang="ko-KR" sz="1400" dirty="0">
+                <a:solidFill>
+                  <a:srgbClr val="26364D"/>
+                </a:solidFill>
+                <a:latin typeface="맑은 고딕"/>
+                <a:ea typeface="맑은 고딕"/>
+              </a:rPr>
+              <a:t>, </a:t>
+            </a:r>
+            <a:r>
+              <a:rPr lang="ko-KR" altLang="en-US" sz="1400" dirty="0">
+                <a:solidFill>
+                  <a:srgbClr val="26364D"/>
+                </a:solidFill>
+                <a:latin typeface="맑은 고딕"/>
+                <a:ea typeface="맑은 고딕"/>
+              </a:rPr>
+              <a:t>재가노인복지시설 등</a:t>
+            </a:r>
+            <a:endParaRPr lang="en-US" altLang="ko-KR" sz="1400" dirty="0">
+              <a:solidFill>
+                <a:srgbClr val="26364D"/>
+              </a:solidFill>
+              <a:latin typeface="맑은 고딕"/>
+              <a:ea typeface="맑은 고딕"/>
+            </a:endParaRPr>
+          </a:p>
+          <a:p>
+            <a:r>
+              <a:rPr lang="ko-KR" altLang="en-US" sz="1400" dirty="0">
+                <a:solidFill>
+                  <a:srgbClr val="26364D"/>
+                </a:solidFill>
+                <a:latin typeface="맑은 고딕"/>
+                <a:ea typeface="맑은 고딕"/>
+              </a:rPr>
+              <a:t>
 세 유형별 지표를 결합해 행정동의 상대적 복지 수요를 비교한다</a:t>
             </a:r>
             <a:endParaRPr lang="ko-KR" sz="1400" dirty="0">
@@ -15182,7 +15608,7 @@
 
 <file path=ppt/webextensions/taskpanes.xml><?xml version="1.0" encoding="utf-8"?>
 <wetp:taskpanes xmlns:wetp="http://schemas.microsoft.com/office/webextensions/taskpanes/2010/11">
-  <wetp:taskpane dockstate="right" visibility="0" width="350" row="1">
+  <wetp:taskpane dockstate="right" visibility="0" width="350" row="2">
     <wetp:webextensionref xmlns:r="http://schemas.openxmlformats.org/officeDocument/2006/relationships" r:id="rId1"/>
   </wetp:taskpane>
 </wetp:taskpanes>
